--- a/public/fun/pack/pptx/birthday/돌잔치_04_감사인사중심_제주유채밭.pptx
+++ b/public/fun/pack/pptx/birthday/돌잔치_04_감사인사중심_제주유채밭.pptx
@@ -3347,7 +3347,7 @@
             <a:r>
               <a:rPr sz="4000" b="1" i="0">
                 <a:solidFill>
-                  <a:srgbClr val="605610"/>
+                  <a:srgbClr val="72671D"/>
                 </a:solidFill>
               </a:rPr>
               <a:t>첫 번째 생일</a:t>
@@ -3385,7 +3385,7 @@
             <a:r>
               <a:rPr sz="1700" b="0" i="1">
                 <a:solidFill>
-                  <a:srgbClr val="605610"/>
+                  <a:srgbClr val="72671D"/>
                 </a:solidFill>
               </a:rPr>
               <a:t>귀한 걸음 해 주신 분들께 인사드립니다</a:t>
@@ -3487,7 +3487,7 @@
             <a:avLst/>
           </a:prstGeom>
           <a:solidFill>
-            <a:srgbClr val="B8A41E"/>
+            <a:srgbClr val="DFC93A"/>
           </a:solidFill>
           <a:ln>
             <a:noFill/>
@@ -3556,11 +3556,11 @@
             </a:avLst>
           </a:prstGeom>
           <a:solidFill>
-            <a:srgbClr val="F8F2C9"/>
+            <a:srgbClr val="F7F3D4"/>
           </a:solidFill>
           <a:ln w="19050">
             <a:solidFill>
-              <a:srgbClr val="B8A41E"/>
+              <a:srgbClr val="DFC93A"/>
             </a:solidFill>
             <a:prstDash val="dash"/>
           </a:ln>
@@ -3579,7 +3579,7 @@
             <a:r>
               <a:rPr sz="1400" b="0" i="0">
                 <a:solidFill>
-                  <a:srgbClr val="605610"/>
+                  <a:srgbClr val="72671D"/>
                 </a:solidFill>
               </a:rPr>
               <a:t>아기 사진을 넣어 주세요</a:t>
@@ -3619,7 +3619,7 @@
                       <a:r>
                         <a:rPr sz="1500" b="1">
                           <a:solidFill>
-                            <a:srgbClr val="605610"/>
+                            <a:srgbClr val="72671D"/>
                           </a:solidFill>
                         </a:rPr>
                         <a:t>이름</a:t>
@@ -3629,30 +3629,30 @@
                   <a:tcPr anchor="ctr" marL="73152" marR="73152">
                     <a:lnL w="9525" cap="flat" cmpd="sng" algn="ctr">
                       <a:solidFill>
-                        <a:srgbClr val="F8F2C9"/>
+                        <a:srgbClr val="F7F3D4"/>
                       </a:solidFill>
                       <a:prstDash val="solid"/>
                     </a:lnL>
                     <a:lnR w="9525" cap="flat" cmpd="sng" algn="ctr">
                       <a:solidFill>
-                        <a:srgbClr val="F8F2C9"/>
+                        <a:srgbClr val="F7F3D4"/>
                       </a:solidFill>
                       <a:prstDash val="solid"/>
                     </a:lnR>
                     <a:lnT w="9525" cap="flat" cmpd="sng" algn="ctr">
                       <a:solidFill>
-                        <a:srgbClr val="F8F2C9"/>
+                        <a:srgbClr val="F7F3D4"/>
                       </a:solidFill>
                       <a:prstDash val="solid"/>
                     </a:lnT>
                     <a:lnB w="9525" cap="flat" cmpd="sng" algn="ctr">
                       <a:solidFill>
-                        <a:srgbClr val="F8F2C9"/>
+                        <a:srgbClr val="F7F3D4"/>
                       </a:solidFill>
                       <a:prstDash val="solid"/>
                     </a:lnB>
                     <a:solidFill>
-                      <a:srgbClr val="F8F2C9"/>
+                      <a:srgbClr val="F7F3D4"/>
                     </a:solidFill>
                   </a:tcPr>
                 </a:tc>
@@ -3675,30 +3675,30 @@
                   <a:tcPr anchor="ctr" marL="73152" marR="73152">
                     <a:lnL w="9525" cap="flat" cmpd="sng" algn="ctr">
                       <a:solidFill>
-                        <a:srgbClr val="F8F2C9"/>
+                        <a:srgbClr val="F7F3D4"/>
                       </a:solidFill>
                       <a:prstDash val="solid"/>
                     </a:lnL>
                     <a:lnR w="9525" cap="flat" cmpd="sng" algn="ctr">
                       <a:solidFill>
-                        <a:srgbClr val="F8F2C9"/>
+                        <a:srgbClr val="F7F3D4"/>
                       </a:solidFill>
                       <a:prstDash val="solid"/>
                     </a:lnR>
                     <a:lnT w="9525" cap="flat" cmpd="sng" algn="ctr">
                       <a:solidFill>
-                        <a:srgbClr val="F8F2C9"/>
+                        <a:srgbClr val="F7F3D4"/>
                       </a:solidFill>
                       <a:prstDash val="solid"/>
                     </a:lnT>
                     <a:lnB w="9525" cap="flat" cmpd="sng" algn="ctr">
                       <a:solidFill>
-                        <a:srgbClr val="F8F2C9"/>
+                        <a:srgbClr val="F7F3D4"/>
                       </a:solidFill>
                       <a:prstDash val="solid"/>
                     </a:lnB>
                     <a:solidFill>
-                      <a:srgbClr val="FCFAED"/>
+                      <a:srgbClr val="FCFBF3"/>
                     </a:solidFill>
                   </a:tcPr>
                 </a:tc>
@@ -3713,7 +3713,7 @@
                       <a:r>
                         <a:rPr sz="1500" b="1">
                           <a:solidFill>
-                            <a:srgbClr val="605610"/>
+                            <a:srgbClr val="72671D"/>
                           </a:solidFill>
                         </a:rPr>
                         <a:t>생일</a:t>
@@ -3723,30 +3723,30 @@
                   <a:tcPr anchor="ctr" marL="73152" marR="73152">
                     <a:lnL w="9525" cap="flat" cmpd="sng" algn="ctr">
                       <a:solidFill>
-                        <a:srgbClr val="F8F2C9"/>
+                        <a:srgbClr val="F7F3D4"/>
                       </a:solidFill>
                       <a:prstDash val="solid"/>
                     </a:lnL>
                     <a:lnR w="9525" cap="flat" cmpd="sng" algn="ctr">
                       <a:solidFill>
-                        <a:srgbClr val="F8F2C9"/>
+                        <a:srgbClr val="F7F3D4"/>
                       </a:solidFill>
                       <a:prstDash val="solid"/>
                     </a:lnR>
                     <a:lnT w="9525" cap="flat" cmpd="sng" algn="ctr">
                       <a:solidFill>
-                        <a:srgbClr val="F8F2C9"/>
+                        <a:srgbClr val="F7F3D4"/>
                       </a:solidFill>
                       <a:prstDash val="solid"/>
                     </a:lnT>
                     <a:lnB w="9525" cap="flat" cmpd="sng" algn="ctr">
                       <a:solidFill>
-                        <a:srgbClr val="F8F2C9"/>
+                        <a:srgbClr val="F7F3D4"/>
                       </a:solidFill>
                       <a:prstDash val="solid"/>
                     </a:lnB>
                     <a:solidFill>
-                      <a:srgbClr val="F8F2C9"/>
+                      <a:srgbClr val="F7F3D4"/>
                     </a:solidFill>
                   </a:tcPr>
                 </a:tc>
@@ -3769,25 +3769,25 @@
                   <a:tcPr anchor="ctr" marL="73152" marR="73152">
                     <a:lnL w="9525" cap="flat" cmpd="sng" algn="ctr">
                       <a:solidFill>
-                        <a:srgbClr val="F8F2C9"/>
+                        <a:srgbClr val="F7F3D4"/>
                       </a:solidFill>
                       <a:prstDash val="solid"/>
                     </a:lnL>
                     <a:lnR w="9525" cap="flat" cmpd="sng" algn="ctr">
                       <a:solidFill>
-                        <a:srgbClr val="F8F2C9"/>
+                        <a:srgbClr val="F7F3D4"/>
                       </a:solidFill>
                       <a:prstDash val="solid"/>
                     </a:lnR>
                     <a:lnT w="9525" cap="flat" cmpd="sng" algn="ctr">
                       <a:solidFill>
-                        <a:srgbClr val="F8F2C9"/>
+                        <a:srgbClr val="F7F3D4"/>
                       </a:solidFill>
                       <a:prstDash val="solid"/>
                     </a:lnT>
                     <a:lnB w="9525" cap="flat" cmpd="sng" algn="ctr">
                       <a:solidFill>
-                        <a:srgbClr val="F8F2C9"/>
+                        <a:srgbClr val="F7F3D4"/>
                       </a:solidFill>
                       <a:prstDash val="solid"/>
                     </a:lnB>
@@ -3807,7 +3807,7 @@
                       <a:r>
                         <a:rPr sz="1500" b="1">
                           <a:solidFill>
-                            <a:srgbClr val="605610"/>
+                            <a:srgbClr val="72671D"/>
                           </a:solidFill>
                         </a:rPr>
                         <a:t>키 · 몸무게</a:t>
@@ -3817,30 +3817,30 @@
                   <a:tcPr anchor="ctr" marL="73152" marR="73152">
                     <a:lnL w="9525" cap="flat" cmpd="sng" algn="ctr">
                       <a:solidFill>
-                        <a:srgbClr val="F8F2C9"/>
+                        <a:srgbClr val="F7F3D4"/>
                       </a:solidFill>
                       <a:prstDash val="solid"/>
                     </a:lnL>
                     <a:lnR w="9525" cap="flat" cmpd="sng" algn="ctr">
                       <a:solidFill>
-                        <a:srgbClr val="F8F2C9"/>
+                        <a:srgbClr val="F7F3D4"/>
                       </a:solidFill>
                       <a:prstDash val="solid"/>
                     </a:lnR>
                     <a:lnT w="9525" cap="flat" cmpd="sng" algn="ctr">
                       <a:solidFill>
-                        <a:srgbClr val="F8F2C9"/>
+                        <a:srgbClr val="F7F3D4"/>
                       </a:solidFill>
                       <a:prstDash val="solid"/>
                     </a:lnT>
                     <a:lnB w="9525" cap="flat" cmpd="sng" algn="ctr">
                       <a:solidFill>
-                        <a:srgbClr val="F8F2C9"/>
+                        <a:srgbClr val="F7F3D4"/>
                       </a:solidFill>
                       <a:prstDash val="solid"/>
                     </a:lnB>
                     <a:solidFill>
-                      <a:srgbClr val="F8F2C9"/>
+                      <a:srgbClr val="F7F3D4"/>
                     </a:solidFill>
                   </a:tcPr>
                 </a:tc>
@@ -3863,30 +3863,30 @@
                   <a:tcPr anchor="ctr" marL="73152" marR="73152">
                     <a:lnL w="9525" cap="flat" cmpd="sng" algn="ctr">
                       <a:solidFill>
-                        <a:srgbClr val="F8F2C9"/>
+                        <a:srgbClr val="F7F3D4"/>
                       </a:solidFill>
                       <a:prstDash val="solid"/>
                     </a:lnL>
                     <a:lnR w="9525" cap="flat" cmpd="sng" algn="ctr">
                       <a:solidFill>
-                        <a:srgbClr val="F8F2C9"/>
+                        <a:srgbClr val="F7F3D4"/>
                       </a:solidFill>
                       <a:prstDash val="solid"/>
                     </a:lnR>
                     <a:lnT w="9525" cap="flat" cmpd="sng" algn="ctr">
                       <a:solidFill>
-                        <a:srgbClr val="F8F2C9"/>
+                        <a:srgbClr val="F7F3D4"/>
                       </a:solidFill>
                       <a:prstDash val="solid"/>
                     </a:lnT>
                     <a:lnB w="9525" cap="flat" cmpd="sng" algn="ctr">
                       <a:solidFill>
-                        <a:srgbClr val="F8F2C9"/>
+                        <a:srgbClr val="F7F3D4"/>
                       </a:solidFill>
                       <a:prstDash val="solid"/>
                     </a:lnB>
                     <a:solidFill>
-                      <a:srgbClr val="FCFAED"/>
+                      <a:srgbClr val="FCFBF3"/>
                     </a:solidFill>
                   </a:tcPr>
                 </a:tc>
@@ -3901,7 +3901,7 @@
                       <a:r>
                         <a:rPr sz="1500" b="1">
                           <a:solidFill>
-                            <a:srgbClr val="605610"/>
+                            <a:srgbClr val="72671D"/>
                           </a:solidFill>
                         </a:rPr>
                         <a:t>좋아하는 것</a:t>
@@ -3911,30 +3911,30 @@
                   <a:tcPr anchor="ctr" marL="73152" marR="73152">
                     <a:lnL w="9525" cap="flat" cmpd="sng" algn="ctr">
                       <a:solidFill>
-                        <a:srgbClr val="F8F2C9"/>
+                        <a:srgbClr val="F7F3D4"/>
                       </a:solidFill>
                       <a:prstDash val="solid"/>
                     </a:lnL>
                     <a:lnR w="9525" cap="flat" cmpd="sng" algn="ctr">
                       <a:solidFill>
-                        <a:srgbClr val="F8F2C9"/>
+                        <a:srgbClr val="F7F3D4"/>
                       </a:solidFill>
                       <a:prstDash val="solid"/>
                     </a:lnR>
                     <a:lnT w="9525" cap="flat" cmpd="sng" algn="ctr">
                       <a:solidFill>
-                        <a:srgbClr val="F8F2C9"/>
+                        <a:srgbClr val="F7F3D4"/>
                       </a:solidFill>
                       <a:prstDash val="solid"/>
                     </a:lnT>
                     <a:lnB w="9525" cap="flat" cmpd="sng" algn="ctr">
                       <a:solidFill>
-                        <a:srgbClr val="F8F2C9"/>
+                        <a:srgbClr val="F7F3D4"/>
                       </a:solidFill>
                       <a:prstDash val="solid"/>
                     </a:lnB>
                     <a:solidFill>
-                      <a:srgbClr val="F8F2C9"/>
+                      <a:srgbClr val="F7F3D4"/>
                     </a:solidFill>
                   </a:tcPr>
                 </a:tc>
@@ -3957,25 +3957,25 @@
                   <a:tcPr anchor="ctr" marL="73152" marR="73152">
                     <a:lnL w="9525" cap="flat" cmpd="sng" algn="ctr">
                       <a:solidFill>
-                        <a:srgbClr val="F8F2C9"/>
+                        <a:srgbClr val="F7F3D4"/>
                       </a:solidFill>
                       <a:prstDash val="solid"/>
                     </a:lnL>
                     <a:lnR w="9525" cap="flat" cmpd="sng" algn="ctr">
                       <a:solidFill>
-                        <a:srgbClr val="F8F2C9"/>
+                        <a:srgbClr val="F7F3D4"/>
                       </a:solidFill>
                       <a:prstDash val="solid"/>
                     </a:lnR>
                     <a:lnT w="9525" cap="flat" cmpd="sng" algn="ctr">
                       <a:solidFill>
-                        <a:srgbClr val="F8F2C9"/>
+                        <a:srgbClr val="F7F3D4"/>
                       </a:solidFill>
                       <a:prstDash val="solid"/>
                     </a:lnT>
                     <a:lnB w="9525" cap="flat" cmpd="sng" algn="ctr">
                       <a:solidFill>
-                        <a:srgbClr val="F8F2C9"/>
+                        <a:srgbClr val="F7F3D4"/>
                       </a:solidFill>
                       <a:prstDash val="solid"/>
                     </a:lnB>
@@ -3995,7 +3995,7 @@
                       <a:r>
                         <a:rPr sz="1500" b="1">
                           <a:solidFill>
-                            <a:srgbClr val="605610"/>
+                            <a:srgbClr val="72671D"/>
                           </a:solidFill>
                         </a:rPr>
                         <a:t>별명</a:t>
@@ -4005,30 +4005,30 @@
                   <a:tcPr anchor="ctr" marL="73152" marR="73152">
                     <a:lnL w="9525" cap="flat" cmpd="sng" algn="ctr">
                       <a:solidFill>
-                        <a:srgbClr val="F8F2C9"/>
+                        <a:srgbClr val="F7F3D4"/>
                       </a:solidFill>
                       <a:prstDash val="solid"/>
                     </a:lnL>
                     <a:lnR w="9525" cap="flat" cmpd="sng" algn="ctr">
                       <a:solidFill>
-                        <a:srgbClr val="F8F2C9"/>
+                        <a:srgbClr val="F7F3D4"/>
                       </a:solidFill>
                       <a:prstDash val="solid"/>
                     </a:lnR>
                     <a:lnT w="9525" cap="flat" cmpd="sng" algn="ctr">
                       <a:solidFill>
-                        <a:srgbClr val="F8F2C9"/>
+                        <a:srgbClr val="F7F3D4"/>
                       </a:solidFill>
                       <a:prstDash val="solid"/>
                     </a:lnT>
                     <a:lnB w="9525" cap="flat" cmpd="sng" algn="ctr">
                       <a:solidFill>
-                        <a:srgbClr val="F8F2C9"/>
+                        <a:srgbClr val="F7F3D4"/>
                       </a:solidFill>
                       <a:prstDash val="solid"/>
                     </a:lnB>
                     <a:solidFill>
-                      <a:srgbClr val="F8F2C9"/>
+                      <a:srgbClr val="F7F3D4"/>
                     </a:solidFill>
                   </a:tcPr>
                 </a:tc>
@@ -4051,30 +4051,30 @@
                   <a:tcPr anchor="ctr" marL="73152" marR="73152">
                     <a:lnL w="9525" cap="flat" cmpd="sng" algn="ctr">
                       <a:solidFill>
-                        <a:srgbClr val="F8F2C9"/>
+                        <a:srgbClr val="F7F3D4"/>
                       </a:solidFill>
                       <a:prstDash val="solid"/>
                     </a:lnL>
                     <a:lnR w="9525" cap="flat" cmpd="sng" algn="ctr">
                       <a:solidFill>
-                        <a:srgbClr val="F8F2C9"/>
+                        <a:srgbClr val="F7F3D4"/>
                       </a:solidFill>
                       <a:prstDash val="solid"/>
                     </a:lnR>
                     <a:lnT w="9525" cap="flat" cmpd="sng" algn="ctr">
                       <a:solidFill>
-                        <a:srgbClr val="F8F2C9"/>
+                        <a:srgbClr val="F7F3D4"/>
                       </a:solidFill>
                       <a:prstDash val="solid"/>
                     </a:lnT>
                     <a:lnB w="9525" cap="flat" cmpd="sng" algn="ctr">
                       <a:solidFill>
-                        <a:srgbClr val="F8F2C9"/>
+                        <a:srgbClr val="F7F3D4"/>
                       </a:solidFill>
                       <a:prstDash val="solid"/>
                     </a:lnB>
                     <a:solidFill>
-                      <a:srgbClr val="FCFAED"/>
+                      <a:srgbClr val="FCFBF3"/>
                     </a:solidFill>
                   </a:tcPr>
                 </a:tc>
@@ -4089,7 +4089,7 @@
                       <a:r>
                         <a:rPr sz="1500" b="1">
                           <a:solidFill>
-                            <a:srgbClr val="605610"/>
+                            <a:srgbClr val="72671D"/>
                           </a:solidFill>
                         </a:rPr>
                         <a:t>부모의 마음</a:t>
@@ -4099,30 +4099,30 @@
                   <a:tcPr anchor="ctr" marL="73152" marR="73152">
                     <a:lnL w="9525" cap="flat" cmpd="sng" algn="ctr">
                       <a:solidFill>
-                        <a:srgbClr val="F8F2C9"/>
+                        <a:srgbClr val="F7F3D4"/>
                       </a:solidFill>
                       <a:prstDash val="solid"/>
                     </a:lnL>
                     <a:lnR w="9525" cap="flat" cmpd="sng" algn="ctr">
                       <a:solidFill>
-                        <a:srgbClr val="F8F2C9"/>
+                        <a:srgbClr val="F7F3D4"/>
                       </a:solidFill>
                       <a:prstDash val="solid"/>
                     </a:lnR>
                     <a:lnT w="9525" cap="flat" cmpd="sng" algn="ctr">
                       <a:solidFill>
-                        <a:srgbClr val="F8F2C9"/>
+                        <a:srgbClr val="F7F3D4"/>
                       </a:solidFill>
                       <a:prstDash val="solid"/>
                     </a:lnT>
                     <a:lnB w="9525" cap="flat" cmpd="sng" algn="ctr">
                       <a:solidFill>
-                        <a:srgbClr val="F8F2C9"/>
+                        <a:srgbClr val="F7F3D4"/>
                       </a:solidFill>
                       <a:prstDash val="solid"/>
                     </a:lnB>
                     <a:solidFill>
-                      <a:srgbClr val="F8F2C9"/>
+                      <a:srgbClr val="F7F3D4"/>
                     </a:solidFill>
                   </a:tcPr>
                 </a:tc>
@@ -4145,25 +4145,25 @@
                   <a:tcPr anchor="ctr" marL="73152" marR="73152">
                     <a:lnL w="9525" cap="flat" cmpd="sng" algn="ctr">
                       <a:solidFill>
-                        <a:srgbClr val="F8F2C9"/>
+                        <a:srgbClr val="F7F3D4"/>
                       </a:solidFill>
                       <a:prstDash val="solid"/>
                     </a:lnL>
                     <a:lnR w="9525" cap="flat" cmpd="sng" algn="ctr">
                       <a:solidFill>
-                        <a:srgbClr val="F8F2C9"/>
+                        <a:srgbClr val="F7F3D4"/>
                       </a:solidFill>
                       <a:prstDash val="solid"/>
                     </a:lnR>
                     <a:lnT w="9525" cap="flat" cmpd="sng" algn="ctr">
                       <a:solidFill>
-                        <a:srgbClr val="F8F2C9"/>
+                        <a:srgbClr val="F7F3D4"/>
                       </a:solidFill>
                       <a:prstDash val="solid"/>
                     </a:lnT>
                     <a:lnB w="9525" cap="flat" cmpd="sng" algn="ctr">
                       <a:solidFill>
-                        <a:srgbClr val="F8F2C9"/>
+                        <a:srgbClr val="F7F3D4"/>
                       </a:solidFill>
                       <a:prstDash val="solid"/>
                     </a:lnB>
@@ -4218,7 +4218,7 @@
             <a:avLst/>
           </a:prstGeom>
           <a:solidFill>
-            <a:srgbClr val="B8A41E"/>
+            <a:srgbClr val="DFC93A"/>
           </a:solidFill>
           <a:ln>
             <a:noFill/>
@@ -4287,11 +4287,11 @@
             </a:avLst>
           </a:prstGeom>
           <a:solidFill>
-            <a:srgbClr val="FCFAED"/>
+            <a:srgbClr val="FCFBF3"/>
           </a:solidFill>
           <a:ln w="12700">
             <a:solidFill>
-              <a:srgbClr val="F8F2C9"/>
+              <a:srgbClr val="F7F3D4"/>
             </a:solidFill>
           </a:ln>
         </p:spPr>
@@ -4442,7 +4442,7 @@
             <a:avLst/>
           </a:prstGeom>
           <a:solidFill>
-            <a:srgbClr val="B8A41E"/>
+            <a:srgbClr val="DFC93A"/>
           </a:solidFill>
           <a:ln>
             <a:noFill/>
@@ -4511,11 +4511,11 @@
             </a:avLst>
           </a:prstGeom>
           <a:solidFill>
-            <a:srgbClr val="F8F2C9"/>
+            <a:srgbClr val="F7F3D4"/>
           </a:solidFill>
           <a:ln w="12700">
             <a:solidFill>
-              <a:srgbClr val="B8A41E"/>
+              <a:srgbClr val="DFC93A"/>
             </a:solidFill>
           </a:ln>
         </p:spPr>
@@ -4666,7 +4666,7 @@
             <a:avLst/>
           </a:prstGeom>
           <a:solidFill>
-            <a:srgbClr val="B8A41E"/>
+            <a:srgbClr val="DFC93A"/>
           </a:solidFill>
           <a:ln>
             <a:noFill/>
@@ -4735,11 +4735,11 @@
             </a:avLst>
           </a:prstGeom>
           <a:solidFill>
-            <a:srgbClr val="F8F2C9"/>
+            <a:srgbClr val="F7F3D4"/>
           </a:solidFill>
           <a:ln w="19050">
             <a:solidFill>
-              <a:srgbClr val="B8A41E"/>
+              <a:srgbClr val="DFC93A"/>
             </a:solidFill>
             <a:prstDash val="dash"/>
           </a:ln>
@@ -4758,7 +4758,7 @@
             <a:r>
               <a:rPr sz="1200" b="0" i="0">
                 <a:solidFill>
-                  <a:srgbClr val="605610"/>
+                  <a:srgbClr val="72671D"/>
                 </a:solidFill>
               </a:rPr>
               <a:t>사진 1</a:t>
@@ -4783,11 +4783,11 @@
             </a:avLst>
           </a:prstGeom>
           <a:solidFill>
-            <a:srgbClr val="F8F2C9"/>
+            <a:srgbClr val="F7F3D4"/>
           </a:solidFill>
           <a:ln w="19050">
             <a:solidFill>
-              <a:srgbClr val="B8A41E"/>
+              <a:srgbClr val="DFC93A"/>
             </a:solidFill>
             <a:prstDash val="dash"/>
           </a:ln>
@@ -4806,7 +4806,7 @@
             <a:r>
               <a:rPr sz="1200" b="0" i="0">
                 <a:solidFill>
-                  <a:srgbClr val="605610"/>
+                  <a:srgbClr val="72671D"/>
                 </a:solidFill>
               </a:rPr>
               <a:t>사진 2</a:t>
@@ -4831,11 +4831,11 @@
             </a:avLst>
           </a:prstGeom>
           <a:solidFill>
-            <a:srgbClr val="F8F2C9"/>
+            <a:srgbClr val="F7F3D4"/>
           </a:solidFill>
           <a:ln w="19050">
             <a:solidFill>
-              <a:srgbClr val="B8A41E"/>
+              <a:srgbClr val="DFC93A"/>
             </a:solidFill>
             <a:prstDash val="dash"/>
           </a:ln>
@@ -4854,7 +4854,7 @@
             <a:r>
               <a:rPr sz="1200" b="0" i="0">
                 <a:solidFill>
-                  <a:srgbClr val="605610"/>
+                  <a:srgbClr val="72671D"/>
                 </a:solidFill>
               </a:rPr>
               <a:t>사진 3</a:t>
@@ -4879,11 +4879,11 @@
             </a:avLst>
           </a:prstGeom>
           <a:solidFill>
-            <a:srgbClr val="F8F2C9"/>
+            <a:srgbClr val="F7F3D4"/>
           </a:solidFill>
           <a:ln w="19050">
             <a:solidFill>
-              <a:srgbClr val="B8A41E"/>
+              <a:srgbClr val="DFC93A"/>
             </a:solidFill>
             <a:prstDash val="dash"/>
           </a:ln>
@@ -4902,7 +4902,7 @@
             <a:r>
               <a:rPr sz="1200" b="0" i="0">
                 <a:solidFill>
-                  <a:srgbClr val="605610"/>
+                  <a:srgbClr val="72671D"/>
                 </a:solidFill>
               </a:rPr>
               <a:t>사진 4</a:t>
@@ -4927,11 +4927,11 @@
             </a:avLst>
           </a:prstGeom>
           <a:solidFill>
-            <a:srgbClr val="F8F2C9"/>
+            <a:srgbClr val="F7F3D4"/>
           </a:solidFill>
           <a:ln w="19050">
             <a:solidFill>
-              <a:srgbClr val="B8A41E"/>
+              <a:srgbClr val="DFC93A"/>
             </a:solidFill>
             <a:prstDash val="dash"/>
           </a:ln>
@@ -4950,7 +4950,7 @@
             <a:r>
               <a:rPr sz="1200" b="0" i="0">
                 <a:solidFill>
-                  <a:srgbClr val="605610"/>
+                  <a:srgbClr val="72671D"/>
                 </a:solidFill>
               </a:rPr>
               <a:t>사진 5</a:t>
@@ -4975,11 +4975,11 @@
             </a:avLst>
           </a:prstGeom>
           <a:solidFill>
-            <a:srgbClr val="F8F2C9"/>
+            <a:srgbClr val="F7F3D4"/>
           </a:solidFill>
           <a:ln w="19050">
             <a:solidFill>
-              <a:srgbClr val="B8A41E"/>
+              <a:srgbClr val="DFC93A"/>
             </a:solidFill>
             <a:prstDash val="dash"/>
           </a:ln>
@@ -4998,7 +4998,7 @@
             <a:r>
               <a:rPr sz="1200" b="0" i="0">
                 <a:solidFill>
-                  <a:srgbClr val="605610"/>
+                  <a:srgbClr val="72671D"/>
                 </a:solidFill>
               </a:rPr>
               <a:t>사진 6</a:t>
@@ -5023,11 +5023,11 @@
             </a:avLst>
           </a:prstGeom>
           <a:solidFill>
-            <a:srgbClr val="F8F2C9"/>
+            <a:srgbClr val="F7F3D4"/>
           </a:solidFill>
           <a:ln w="19050">
             <a:solidFill>
-              <a:srgbClr val="B8A41E"/>
+              <a:srgbClr val="DFC93A"/>
             </a:solidFill>
             <a:prstDash val="dash"/>
           </a:ln>
@@ -5046,7 +5046,7 @@
             <a:r>
               <a:rPr sz="1200" b="0" i="0">
                 <a:solidFill>
-                  <a:srgbClr val="605610"/>
+                  <a:srgbClr val="72671D"/>
                 </a:solidFill>
               </a:rPr>
               <a:t>사진 7</a:t>
@@ -5071,11 +5071,11 @@
             </a:avLst>
           </a:prstGeom>
           <a:solidFill>
-            <a:srgbClr val="F8F2C9"/>
+            <a:srgbClr val="F7F3D4"/>
           </a:solidFill>
           <a:ln w="19050">
             <a:solidFill>
-              <a:srgbClr val="B8A41E"/>
+              <a:srgbClr val="DFC93A"/>
             </a:solidFill>
             <a:prstDash val="dash"/>
           </a:ln>
@@ -5094,7 +5094,7 @@
             <a:r>
               <a:rPr sz="1200" b="0" i="0">
                 <a:solidFill>
-                  <a:srgbClr val="605610"/>
+                  <a:srgbClr val="72671D"/>
                 </a:solidFill>
               </a:rPr>
               <a:t>사진 8</a:t>
@@ -5174,7 +5174,7 @@
             <a:r>
               <a:rPr sz="3400" b="1" i="0">
                 <a:solidFill>
-                  <a:srgbClr val="605610"/>
+                  <a:srgbClr val="72671D"/>
                 </a:solidFill>
               </a:rPr>
               <a:t>와 주셔서 고맙습니다</a:t>
@@ -5212,7 +5212,7 @@
             <a:r>
               <a:rPr sz="1700" b="0" i="1">
                 <a:solidFill>
-                  <a:srgbClr val="605610"/>
+                  <a:srgbClr val="72671D"/>
                 </a:solidFill>
               </a:rPr>
               <a:t>아이가 한 살이 되었습니다</a:t>
@@ -5277,34 +5277,34 @@
         <a:sysClr val="window" lastClr="FFFFFF"/>
       </a:lt1>
       <a:dk2>
-        <a:srgbClr val="605610"/>
+        <a:srgbClr val="72671D"/>
       </a:dk2>
       <a:lt2>
-        <a:srgbClr val="FCFAED"/>
+        <a:srgbClr val="FCFBF3"/>
       </a:lt2>
       <a:accent1>
-        <a:srgbClr val="B8A41E"/>
+        <a:srgbClr val="DFC93A"/>
       </a:accent1>
       <a:accent2>
-        <a:srgbClr val="3B7191"/>
+        <a:srgbClr val="339941"/>
       </a:accent2>
       <a:accent3>
-        <a:srgbClr val="605610"/>
+        <a:srgbClr val="72671D"/>
       </a:accent3>
       <a:accent4>
-        <a:srgbClr val="F8F2C9"/>
+        <a:srgbClr val="F7F3D4"/>
       </a:accent4>
       <a:accent5>
-        <a:srgbClr val="7A8A58"/>
+        <a:srgbClr val="89B13E"/>
       </a:accent5>
       <a:accent6>
-        <a:srgbClr val="A09A70"/>
+        <a:srgbClr val="AAA477"/>
       </a:accent6>
       <a:hlink>
-        <a:srgbClr val="B8A41E"/>
+        <a:srgbClr val="DFC93A"/>
       </a:hlink>
       <a:folHlink>
-        <a:srgbClr val="605610"/>
+        <a:srgbClr val="72671D"/>
       </a:folHlink>
     </a:clrScheme>
     <a:fontScheme name="Office">
